--- a/CyberShield AI.pptx
+++ b/CyberShield AI.pptx
@@ -117,6 +117,11 @@
       </a:defRPr>
     </a:lvl9pPr>
   </p:defaultTextStyle>
+  <p:extLst>
+    <p:ext uri="{EFAFB233-063F-42B5-8137-9DF3F51BA10A}">
+      <p15:sldGuideLst xmlns:p15="http://schemas.microsoft.com/office/powerpoint/2012/main"/>
+    </p:ext>
+  </p:extLst>
 </p:presentation>
 </file>
 
@@ -214,7 +219,7 @@
           <a:p>
             <a:fld id="{FF6402C8-4320-4B50-83B9-C332CAA596D2}" type="datetimeFigureOut">
               <a:rPr lang="en-IN" smtClean="0"/>
-              <a:t>19-07-2026</a:t>
+              <a:t>10-08-2026</a:t>
             </a:fld>
             <a:endParaRPr lang="en-IN"/>
           </a:p>
@@ -510,6 +515,13 @@
           </p:nvPr>
         </p:nvSpPr>
         <p:spPr/>
+        <p:txBody>
+          <a:bodyPr/>
+          <a:lstStyle/>
+          <a:p>
+            <a:endParaRPr lang="en-IN"/>
+          </a:p>
+        </p:txBody>
       </p:sp>
       <p:sp>
         <p:nvSpPr>
@@ -916,7 +928,7 @@
             <a:fld id="{5923F103-BC34-4FE4-A40E-EDDEECFDA5D0}" type="datetimeFigureOut">
               <a:rPr lang="en-US" dirty="0"/>
               <a:pPr/>
-              <a:t>7/19/2026</a:t>
+              <a:t>8/10/2026</a:t>
             </a:fld>
             <a:endParaRPr lang="en-US" dirty="0"/>
           </a:p>
@@ -2070,7 +2082,7 @@
           <a:p>
             <a:fld id="{923A1CC3-2375-41D4-9E03-427CAF2A4C1A}" type="datetimeFigureOut">
               <a:rPr lang="en-US" dirty="0"/>
-              <a:t>7/19/2026</a:t>
+              <a:t>8/10/2026</a:t>
             </a:fld>
             <a:endParaRPr lang="en-US" dirty="0"/>
           </a:p>
@@ -3116,7 +3128,7 @@
           <a:p>
             <a:fld id="{AFF16868-8199-4C2C-A5B1-63AEE139F88E}" type="datetimeFigureOut">
               <a:rPr lang="en-US" dirty="0"/>
-              <a:t>7/19/2026</a:t>
+              <a:t>8/10/2026</a:t>
             </a:fld>
             <a:endParaRPr lang="en-US" dirty="0"/>
           </a:p>
@@ -4316,7 +4328,7 @@
           <a:p>
             <a:fld id="{AAD9FF7F-6988-44CC-821B-644E70CD2F73}" type="datetimeFigureOut">
               <a:rPr lang="en-US" dirty="0"/>
-              <a:t>7/19/2026</a:t>
+              <a:t>8/10/2026</a:t>
             </a:fld>
             <a:endParaRPr lang="en-US" dirty="0"/>
           </a:p>
@@ -5415,7 +5427,7 @@
           <a:p>
             <a:fld id="{5C12C299-16B2-4475-990D-751901EACC14}" type="datetimeFigureOut">
               <a:rPr lang="en-US" dirty="0"/>
-              <a:t>7/19/2026</a:t>
+              <a:t>8/10/2026</a:t>
             </a:fld>
             <a:endParaRPr lang="en-US" dirty="0"/>
           </a:p>
@@ -6078,7 +6090,7 @@
           <a:p>
             <a:fld id="{9FE86839-B9D8-4651-8783-F325ECE74E65}" type="datetimeFigureOut">
               <a:rPr lang="en-US" dirty="0"/>
-              <a:t>7/19/2026</a:t>
+              <a:t>8/10/2026</a:t>
             </a:fld>
             <a:endParaRPr lang="en-US" dirty="0"/>
           </a:p>
@@ -6935,7 +6947,7 @@
           <a:p>
             <a:fld id="{FD484F64-32F6-45C5-931F-ADC1662401D0}" type="datetimeFigureOut">
               <a:rPr lang="en-US" dirty="0"/>
-              <a:t>7/19/2026</a:t>
+              <a:t>8/10/2026</a:t>
             </a:fld>
             <a:endParaRPr lang="en-US" dirty="0"/>
           </a:p>
@@ -7121,7 +7133,7 @@
           <a:p>
             <a:fld id="{53086D93-FCAC-47E0-A2EE-787E62CA814C}" type="datetimeFigureOut">
               <a:rPr lang="en-US" dirty="0"/>
-              <a:t>7/19/2026</a:t>
+              <a:t>8/10/2026</a:t>
             </a:fld>
             <a:endParaRPr lang="en-US" dirty="0"/>
           </a:p>
@@ -8159,7 +8171,7 @@
           <a:p>
             <a:fld id="{CDA879A6-0FD0-4734-A311-86BFCA472E6E}" type="datetimeFigureOut">
               <a:rPr lang="en-US" dirty="0"/>
-              <a:t>7/19/2026</a:t>
+              <a:t>8/10/2026</a:t>
             </a:fld>
             <a:endParaRPr lang="en-US" dirty="0"/>
           </a:p>
@@ -8373,7 +8385,7 @@
           <a:p>
             <a:fld id="{19C9CA7B-DFD4-44B5-8C60-D14B8CD1FB59}" type="datetimeFigureOut">
               <a:rPr lang="en-US" dirty="0"/>
-              <a:t>7/19/2026</a:t>
+              <a:t>8/10/2026</a:t>
             </a:fld>
             <a:endParaRPr lang="en-US" dirty="0"/>
           </a:p>
@@ -9473,7 +9485,7 @@
           <a:p>
             <a:fld id="{F34E6425-0181-43F2-84FC-787E803FD2F8}" type="datetimeFigureOut">
               <a:rPr lang="en-US" dirty="0"/>
-              <a:t>7/19/2026</a:t>
+              <a:t>8/10/2026</a:t>
             </a:fld>
             <a:endParaRPr lang="en-US" dirty="0"/>
           </a:p>
@@ -9748,7 +9760,7 @@
           <a:p>
             <a:fld id="{3BDB8791-F1B0-41E7-B7FD-A781E65C4266}" type="datetimeFigureOut">
               <a:rPr lang="en-US" dirty="0"/>
-              <a:t>7/19/2026</a:t>
+              <a:t>8/10/2026</a:t>
             </a:fld>
             <a:endParaRPr lang="en-US" dirty="0"/>
           </a:p>
@@ -10154,7 +10166,7 @@
           <a:p>
             <a:fld id="{5FDD63B2-E120-4ED8-B27B-C685F510A5FE}" type="datetimeFigureOut">
               <a:rPr lang="en-US" dirty="0"/>
-              <a:t>7/19/2026</a:t>
+              <a:t>8/10/2026</a:t>
             </a:fld>
             <a:endParaRPr lang="en-US" dirty="0"/>
           </a:p>
@@ -10277,7 +10289,7 @@
           <a:p>
             <a:fld id="{7AA18ACC-A947-437B-A130-35BD54FDF1E9}" type="datetimeFigureOut">
               <a:rPr lang="en-US" dirty="0"/>
-              <a:t>7/19/2026</a:t>
+              <a:t>8/10/2026</a:t>
             </a:fld>
             <a:endParaRPr lang="en-US" dirty="0"/>
           </a:p>
@@ -10368,7 +10380,7 @@
           <a:p>
             <a:fld id="{7C8D7E02-BCB8-4D50-A234-369438C08659}" type="datetimeFigureOut">
               <a:rPr lang="en-US" dirty="0"/>
-              <a:t>7/19/2026</a:t>
+              <a:t>8/10/2026</a:t>
             </a:fld>
             <a:endParaRPr lang="en-US" dirty="0"/>
           </a:p>
@@ -11522,7 +11534,7 @@
           <a:p>
             <a:fld id="{76E86A4C-8E40-4F87-A4F0-01A0687C5742}" type="datetimeFigureOut">
               <a:rPr lang="en-US" dirty="0"/>
-              <a:t>7/19/2026</a:t>
+              <a:t>8/10/2026</a:t>
             </a:fld>
             <a:endParaRPr lang="en-US" dirty="0"/>
           </a:p>
@@ -12703,7 +12715,7 @@
           <a:p>
             <a:fld id="{35E72C73-2D91-4E12-BA25-F0AA0C03599B}" type="datetimeFigureOut">
               <a:rPr lang="en-US" dirty="0"/>
-              <a:t>7/19/2026</a:t>
+              <a:t>8/10/2026</a:t>
             </a:fld>
             <a:endParaRPr lang="en-US" dirty="0"/>
           </a:p>
@@ -13766,7 +13778,7 @@
           <a:p>
             <a:fld id="{2BE451C3-0FF4-47C4-B829-773ADF60F88C}" type="datetimeFigureOut">
               <a:rPr lang="en-US" dirty="0"/>
-              <a:t>7/19/2026</a:t>
+              <a:t>8/10/2026</a:t>
             </a:fld>
             <a:endParaRPr lang="en-US" dirty="0"/>
           </a:p>
@@ -14347,8 +14359,8 @@
         </p:nvSpPr>
         <p:spPr>
           <a:xfrm>
-            <a:off x="1046800" y="3333136"/>
-            <a:ext cx="8825658" cy="1917290"/>
+            <a:off x="3042749" y="2115390"/>
+            <a:ext cx="8825658" cy="2713704"/>
           </a:xfrm>
         </p:spPr>
         <p:txBody>
@@ -14358,10 +14370,16 @@
             <a:pPr>
               <a:defRPr sz="3000"/>
             </a:pPr>
-            <a:r>
-              <a:rPr lang="en-IN" sz="4000" b="1" dirty="0"/>
-              <a:t>CyberShield AI</a:t>
-            </a:r>
+            <a:br>
+              <a:rPr lang="en-IN" sz="3200" dirty="0"/>
+            </a:br>
+            <a:r>
+              <a:rPr lang="en-IN" sz="4000" dirty="0"/>
+              <a:t>IBM Internship / Training</a:t>
+            </a:r>
+            <a:br>
+              <a:rPr lang="en-IN" sz="3200" dirty="0"/>
+            </a:br>
             <a:br>
               <a:rPr lang="en-IN" sz="4000" b="1" dirty="0"/>
             </a:br>
@@ -14387,13 +14405,13 @@
         </p:nvSpPr>
         <p:spPr>
           <a:xfrm>
-            <a:off x="1046800" y="4777380"/>
-            <a:ext cx="8933813" cy="1230130"/>
+            <a:off x="630292" y="5357196"/>
+            <a:ext cx="8933813" cy="1042220"/>
           </a:xfrm>
         </p:spPr>
         <p:txBody>
           <a:bodyPr>
-            <a:normAutofit/>
+            <a:normAutofit fontScale="92500" lnSpcReduction="10000"/>
           </a:bodyPr>
           <a:lstStyle/>
           <a:p>
@@ -14444,14 +14462,50 @@
         </p:blipFill>
         <p:spPr>
           <a:xfrm>
-            <a:off x="3637503" y="626258"/>
-            <a:ext cx="4883079" cy="3429000"/>
+            <a:off x="3488339" y="589935"/>
+            <a:ext cx="4883079" cy="2428568"/>
           </a:xfrm>
           <a:prstGeom prst="rect">
             <a:avLst/>
           </a:prstGeom>
         </p:spPr>
       </p:pic>
+      <p:sp>
+        <p:nvSpPr>
+          <p:cNvPr id="7" name="TextBox 6">
+            <a:extLst>
+              <a:ext uri="{FF2B5EF4-FFF2-40B4-BE49-F238E27FC236}">
+                <a16:creationId xmlns:a16="http://schemas.microsoft.com/office/drawing/2014/main" id="{4A20E746-4FDB-923E-90DD-774DDA96348B}"/>
+              </a:ext>
+            </a:extLst>
+          </p:cNvPr>
+          <p:cNvSpPr txBox="1"/>
+          <p:nvPr/>
+        </p:nvSpPr>
+        <p:spPr>
+          <a:xfrm>
+            <a:off x="630292" y="4641588"/>
+            <a:ext cx="5623655" cy="646331"/>
+          </a:xfrm>
+          <a:prstGeom prst="rect">
+            <a:avLst/>
+          </a:prstGeom>
+          <a:noFill/>
+        </p:spPr>
+        <p:txBody>
+          <a:bodyPr wrap="none" rtlCol="0">
+            <a:spAutoFit/>
+          </a:bodyPr>
+          <a:lstStyle/>
+          <a:p>
+            <a:r>
+              <a:rPr lang="en-IN" sz="3600" b="1" dirty="0"/>
+              <a:t>PROJECT-CyberShield AI</a:t>
+            </a:r>
+            <a:endParaRPr lang="en-IN" sz="3600" dirty="0"/>
+          </a:p>
+        </p:txBody>
+      </p:sp>
     </p:spTree>
     <p:extLst>
       <p:ext uri="{BB962C8B-B14F-4D97-AF65-F5344CB8AC3E}">
